--- a/문제해결프로그래밍_숙제/제출용/숙제1_2022182035.pptx
+++ b/문제해결프로그래밍_숙제/제출용/숙제1_2022182035.pptx
@@ -1269,7 +1269,7 @@
         </p:nvSpPr>
         <p:spPr>
           <a:xfrm>
-            <a:off x="381300" y="685800"/>
+            <a:off x="381000" y="685800"/>
             <a:ext cx="6096000" cy="3429000"/>
           </a:xfrm>
           <a:custGeom>
@@ -34505,6 +34505,66 @@
           </a:p>
         </p:txBody>
       </p:sp>
+      <p:pic>
+        <p:nvPicPr>
+          <p:cNvPr id="3" name="그림 2">
+            <a:extLst>
+              <a:ext uri="{FF2B5EF4-FFF2-40B4-BE49-F238E27FC236}">
+                <a16:creationId xmlns:a16="http://schemas.microsoft.com/office/drawing/2014/main" id="{5724FA2B-1112-258C-91AC-3DA014CADB80}"/>
+              </a:ext>
+            </a:extLst>
+          </p:cNvPr>
+          <p:cNvPicPr>
+            <a:picLocks noChangeAspect="1"/>
+          </p:cNvPicPr>
+          <p:nvPr/>
+        </p:nvPicPr>
+        <p:blipFill>
+          <a:blip r:embed="rId3"/>
+          <a:stretch>
+            <a:fillRect/>
+          </a:stretch>
+        </p:blipFill>
+        <p:spPr>
+          <a:xfrm>
+            <a:off x="5192595" y="1070595"/>
+            <a:ext cx="2622853" cy="3711388"/>
+          </a:xfrm>
+          <a:prstGeom prst="rect">
+            <a:avLst/>
+          </a:prstGeom>
+        </p:spPr>
+      </p:pic>
+      <p:pic>
+        <p:nvPicPr>
+          <p:cNvPr id="5" name="그림 4">
+            <a:extLst>
+              <a:ext uri="{FF2B5EF4-FFF2-40B4-BE49-F238E27FC236}">
+                <a16:creationId xmlns:a16="http://schemas.microsoft.com/office/drawing/2014/main" id="{6DDDC695-32AF-6F0F-8E24-8643E84E058A}"/>
+              </a:ext>
+            </a:extLst>
+          </p:cNvPr>
+          <p:cNvPicPr>
+            <a:picLocks noChangeAspect="1"/>
+          </p:cNvPicPr>
+          <p:nvPr/>
+        </p:nvPicPr>
+        <p:blipFill>
+          <a:blip r:embed="rId4"/>
+          <a:stretch>
+            <a:fillRect/>
+          </a:stretch>
+        </p:blipFill>
+        <p:spPr>
+          <a:xfrm>
+            <a:off x="1747108" y="894475"/>
+            <a:ext cx="2204299" cy="4063628"/>
+          </a:xfrm>
+          <a:prstGeom prst="rect">
+            <a:avLst/>
+          </a:prstGeom>
+        </p:spPr>
+      </p:pic>
     </p:spTree>
   </p:cSld>
   <p:clrMapOvr>
